--- a/demo-slides.pptx
+++ b/demo-slides.pptx
@@ -5166,7 +5166,7 @@
                 </a:solidFill>
                 <a:latin typeface="Cambria"/>
               </a:rPr>
-              <a:t>?</a:t>
+              <a:t> TeachBack?</a:t>
             </a:r>
           </a:p>
         </p:txBody>
@@ -5248,7 +5248,7 @@
                 </a:solidFill>
                 <a:latin typeface="Cambria"/>
               </a:rPr>
-              <a:t>Temperature &amp; Sampling</a:t>
+              <a:t>A · TeachBack — dạy lại cho “Mầm”</a:t>
             </a:r>
           </a:p>
         </p:txBody>
@@ -5283,7 +5283,7 @@
                 </a:solidFill>
                 <a:latin typeface="Calibri"/>
               </a:rPr>
-              <a:t>38 người / 50 lượt</a:t>
+              <a:t>0,21% có hỏi lại</a:t>
             </a:r>
           </a:p>
         </p:txBody>
@@ -5318,7 +5318,7 @@
                 </a:solidFill>
                 <a:latin typeface="Calibri"/>
               </a:rPr>
-              <a:t>K4: 26 lượt</a:t>
+              <a:t>84% ủng hộ dạy lại</a:t>
             </a:r>
           </a:p>
         </p:txBody>
@@ -5357,7 +5357,7 @@
                 </a:solidFill>
                 <a:latin typeface="Calibri"/>
               </a:rPr>
-              <a:t>Có thể giới hạn phạm vi kiểm bằng checklist 5 tiêu chí rõ ràng + sẵn 1 quiz thật trong data (T04-071–072).</a:t>
+              <a:t>Giữ được vòng hỏi ngược có kiểm soát trước khi kết luận “đã hiểu” — giới hạn bằng checklist 5 tiêu chí + tối đa 3 câu hỏi gợi mở, khả thi trong 39 giờ.</a:t>
             </a:r>
           </a:p>
         </p:txBody>
@@ -5439,7 +5439,7 @@
                 </a:solidFill>
                 <a:latin typeface="Cambria"/>
               </a:rPr>
-              <a:t>Attention / Self-attention</a:t>
+              <a:t>B · Hỏi ngược ngay trong quiz VLearn</a:t>
             </a:r>
           </a:p>
         </p:txBody>
@@ -5474,7 +5474,7 @@
                 </a:solidFill>
                 <a:latin typeface="Calibri"/>
               </a:rPr>
-              <a:t>54 người / 72 lượt</a:t>
+              <a:t>Cùng bằng chứng 0,21%</a:t>
             </a:r>
           </a:p>
         </p:txBody>
@@ -5509,7 +5509,7 @@
                 </a:solidFill>
                 <a:latin typeface="Calibri"/>
               </a:rPr>
-              <a:t>K4: 14 lượt</a:t>
+              <a:t>Cần sửa quiz thật VLearn</a:t>
             </a:r>
           </a:p>
         </p:txBody>
@@ -5548,7 +5548,7 @@
                 </a:solidFill>
                 <a:latin typeface="Calibri"/>
               </a:rPr>
-              <a:t>Loại: khái niệm trừu tượng, khó chấm “đạt” rõ ràng trong một phiên ngắn.</a:t>
+              <a:t>Loại: phải tích hợp trực tiếp vào hệ thống quiz thật của VLearn — đã là non-goal, không khả thi build trong 39 giờ.</a:t>
             </a:r>
           </a:p>
         </p:txBody>
@@ -5630,7 +5630,7 @@
                 </a:solidFill>
                 <a:latin typeface="Cambria"/>
               </a:rPr>
-              <a:t>Hallucination</a:t>
+              <a:t>C · Form tự chấm 1 lượt</a:t>
             </a:r>
           </a:p>
         </p:txBody>
@@ -5665,7 +5665,7 @@
                 </a:solidFill>
                 <a:latin typeface="Calibri"/>
               </a:rPr>
-              <a:t>35 người / 38 lượt</a:t>
+              <a:t>64% chỉ hiểu “một phần”</a:t>
             </a:r>
           </a:p>
         </p:txBody>
@@ -5700,7 +5700,7 @@
                 </a:solidFill>
                 <a:latin typeface="Calibri"/>
               </a:rPr>
-              <a:t>K4: 9 lượt</a:t>
+              <a:t>Không có vòng hỏi lại</a:t>
             </a:r>
           </a:p>
         </p:txBody>
@@ -5739,7 +5739,7 @@
                 </a:solidFill>
                 <a:latin typeface="Calibri"/>
               </a:rPr>
-              <a:t>Loại: dễ lấn sang phạm vi kiểm chứng ngoài bài, trùng ví dụ mẫu sẵn có trong đề D3.</a:t>
+              <a:t>Loại: dễ báo “đạt” cho câu trả lời mới đúng một phần — vi phạm nguyên tắc báo đạt sai phải đắt hơn báo thiếu sai.</a:t>
             </a:r>
           </a:p>
         </p:txBody>
@@ -8981,8 +8981,8 @@
         </p:nvSpPr>
         <p:spPr>
           <a:xfrm>
-            <a:off x="548640" y="411480"/>
-            <a:ext cx="11064240" cy="594360"/>
+            <a:off x="579120" y="480060"/>
+            <a:ext cx="11064240" cy="430887"/>
           </a:xfrm>
           <a:prstGeom prst="rect">
             <a:avLst/>
@@ -8997,76 +8997,13 @@
           <a:p>
             <a:pPr algn="l"/>
             <a:r>
-              <a:rPr sz="2800" b="1" i="0" dirty="0" err="1">
+              <a:rPr sz="2800" b="1" i="0" dirty="0">
                 <a:solidFill>
                   <a:srgbClr val="1F2A24"/>
                 </a:solidFill>
                 <a:latin typeface="Cambria"/>
               </a:rPr>
-              <a:t>Chưa</a:t>
-            </a:r>
-            <a:r>
-              <a:rPr sz="2800" b="1" i="0" dirty="0">
-                <a:solidFill>
-                  <a:srgbClr val="1F2A24"/>
-                </a:solidFill>
-                <a:latin typeface="Cambria"/>
-              </a:rPr>
-              <a:t> </a:t>
-            </a:r>
-            <a:r>
-              <a:rPr sz="2800" b="1" i="0" dirty="0" err="1">
-                <a:solidFill>
-                  <a:srgbClr val="1F2A24"/>
-                </a:solidFill>
-                <a:latin typeface="Cambria"/>
-              </a:rPr>
-              <a:t>có</a:t>
-            </a:r>
-            <a:r>
-              <a:rPr sz="2800" b="1" i="0" dirty="0">
-                <a:solidFill>
-                  <a:srgbClr val="1F2A24"/>
-                </a:solidFill>
-                <a:latin typeface="Cambria"/>
-              </a:rPr>
-              <a:t> </a:t>
-            </a:r>
-            <a:r>
-              <a:rPr sz="2800" b="1" i="0" dirty="0" err="1">
-                <a:solidFill>
-                  <a:srgbClr val="1F2A24"/>
-                </a:solidFill>
-                <a:latin typeface="Cambria"/>
-              </a:rPr>
-              <a:t>vòng</a:t>
-            </a:r>
-            <a:r>
-              <a:rPr sz="2800" b="1" i="0" dirty="0">
-                <a:solidFill>
-                  <a:srgbClr val="1F2A24"/>
-                </a:solidFill>
-                <a:latin typeface="Cambria"/>
-              </a:rPr>
-              <a:t> validation </a:t>
-            </a:r>
-            <a:r>
-              <a:rPr sz="2800" b="1" i="0" dirty="0" err="1">
-                <a:solidFill>
-                  <a:srgbClr val="1F2A24"/>
-                </a:solidFill>
-                <a:latin typeface="Cambria"/>
-              </a:rPr>
-              <a:t>người</a:t>
-            </a:r>
-            <a:r>
-              <a:rPr sz="2800" b="1" i="0" dirty="0">
-                <a:solidFill>
-                  <a:srgbClr val="1F2A24"/>
-                </a:solidFill>
-                <a:latin typeface="Cambria"/>
-              </a:rPr>
-              <a:t> </a:t>
+              <a:t>Validation người </a:t>
             </a:r>
             <a:r>
               <a:rPr sz="2800" b="1" i="0" dirty="0" err="1">
@@ -9113,7 +9050,7 @@
         <p:spPr>
           <a:xfrm>
             <a:off x="548640" y="1005840"/>
-            <a:ext cx="11064240" cy="365760"/>
+            <a:ext cx="11064240" cy="207749"/>
           </a:xfrm>
           <a:prstGeom prst="rect">
             <a:avLst/>
@@ -9128,13 +9065,22 @@
           <a:p>
             <a:pPr algn="l"/>
             <a:r>
+              <a:rPr sz="1350" b="0" i="1" dirty="0">
+                <a:solidFill>
+                  <a:srgbClr val="55635A"/>
+                </a:solidFill>
+                <a:latin typeface="Calibri"/>
+              </a:rPr>
+              <a:t>Đã thử với 2 willing user khai </a:t>
+            </a:r>
+            <a:r>
               <a:rPr sz="1350" b="0" i="1" dirty="0" err="1">
                 <a:solidFill>
                   <a:srgbClr val="55635A"/>
                 </a:solidFill>
                 <a:latin typeface="Calibri"/>
               </a:rPr>
-              <a:t>Nhóm</a:t>
+              <a:t>từ</a:t>
             </a:r>
             <a:r>
               <a:rPr sz="1350" b="0" i="1" dirty="0">
@@ -9143,221 +9089,8 @@
                 </a:solidFill>
                 <a:latin typeface="Calibri"/>
               </a:rPr>
-              <a:t> </a:t>
-            </a:r>
-            <a:r>
-              <a:rPr sz="1350" b="0" i="1" dirty="0" err="1">
-                <a:solidFill>
-                  <a:srgbClr val="55635A"/>
-                </a:solidFill>
-                <a:latin typeface="Calibri"/>
-              </a:rPr>
-              <a:t>thay</a:t>
-            </a:r>
-            <a:r>
-              <a:rPr sz="1350" b="0" i="1" dirty="0">
-                <a:solidFill>
-                  <a:srgbClr val="55635A"/>
-                </a:solidFill>
-                <a:latin typeface="Calibri"/>
-              </a:rPr>
-              <a:t> </a:t>
-            </a:r>
-            <a:r>
-              <a:rPr sz="1350" b="0" i="1" dirty="0" err="1">
-                <a:solidFill>
-                  <a:srgbClr val="55635A"/>
-                </a:solidFill>
-                <a:latin typeface="Calibri"/>
-              </a:rPr>
-              <a:t>bằng</a:t>
-            </a:r>
-            <a:r>
-              <a:rPr sz="1350" b="0" i="1" dirty="0">
-                <a:solidFill>
-                  <a:srgbClr val="55635A"/>
-                </a:solidFill>
-                <a:latin typeface="Calibri"/>
-              </a:rPr>
-              <a:t> </a:t>
-            </a:r>
-            <a:r>
-              <a:rPr sz="1350" b="0" i="1" dirty="0" err="1">
-                <a:solidFill>
-                  <a:srgbClr val="55635A"/>
-                </a:solidFill>
-                <a:latin typeface="Calibri"/>
-              </a:rPr>
-              <a:t>kết</a:t>
-            </a:r>
-            <a:r>
-              <a:rPr sz="1350" b="0" i="1" dirty="0">
-                <a:solidFill>
-                  <a:srgbClr val="55635A"/>
-                </a:solidFill>
-                <a:latin typeface="Calibri"/>
-              </a:rPr>
-              <a:t> </a:t>
-            </a:r>
-            <a:r>
-              <a:rPr sz="1350" b="0" i="1" dirty="0" err="1">
-                <a:solidFill>
-                  <a:srgbClr val="55635A"/>
-                </a:solidFill>
-                <a:latin typeface="Calibri"/>
-              </a:rPr>
-              <a:t>quả</a:t>
-            </a:r>
-            <a:r>
-              <a:rPr sz="1350" b="0" i="1" dirty="0">
-                <a:solidFill>
-                  <a:srgbClr val="55635A"/>
-                </a:solidFill>
-                <a:latin typeface="Calibri"/>
-              </a:rPr>
-              <a:t> </a:t>
-            </a:r>
-            <a:r>
-              <a:rPr sz="1350" b="0" i="1" dirty="0" err="1">
-                <a:solidFill>
-                  <a:srgbClr val="55635A"/>
-                </a:solidFill>
-                <a:latin typeface="Calibri"/>
-              </a:rPr>
-              <a:t>đo</a:t>
-            </a:r>
-            <a:r>
-              <a:rPr sz="1350" b="0" i="1" dirty="0">
-                <a:solidFill>
-                  <a:srgbClr val="55635A"/>
-                </a:solidFill>
-                <a:latin typeface="Calibri"/>
-              </a:rPr>
-              <a:t> </a:t>
-            </a:r>
-            <a:r>
-              <a:rPr sz="1350" b="0" i="1" dirty="0" err="1">
-                <a:solidFill>
-                  <a:srgbClr val="55635A"/>
-                </a:solidFill>
-                <a:latin typeface="Calibri"/>
-              </a:rPr>
-              <a:t>trên</a:t>
-            </a:r>
-            <a:r>
-              <a:rPr sz="1350" b="0" i="1" dirty="0">
-                <a:solidFill>
-                  <a:srgbClr val="55635A"/>
-                </a:solidFill>
-                <a:latin typeface="Calibri"/>
-              </a:rPr>
-              <a:t> Golden Set: </a:t>
-            </a:r>
-            <a:r>
-              <a:rPr sz="1350" b="0" i="1" dirty="0" err="1">
-                <a:solidFill>
-                  <a:srgbClr val="55635A"/>
-                </a:solidFill>
-                <a:latin typeface="Calibri"/>
-              </a:rPr>
-              <a:t>đạt</a:t>
-            </a:r>
-            <a:r>
-              <a:rPr sz="1350" b="0" i="1" dirty="0">
-                <a:solidFill>
-                  <a:srgbClr val="55635A"/>
-                </a:solidFill>
-                <a:latin typeface="Calibri"/>
-              </a:rPr>
-              <a:t> / </a:t>
-            </a:r>
-            <a:r>
-              <a:rPr sz="1350" b="0" i="1" dirty="0" err="1">
-                <a:solidFill>
-                  <a:srgbClr val="55635A"/>
-                </a:solidFill>
-                <a:latin typeface="Calibri"/>
-              </a:rPr>
-              <a:t>không</a:t>
-            </a:r>
-            <a:r>
-              <a:rPr sz="1350" b="0" i="1" dirty="0">
-                <a:solidFill>
-                  <a:srgbClr val="55635A"/>
-                </a:solidFill>
-                <a:latin typeface="Calibri"/>
-              </a:rPr>
-              <a:t> </a:t>
-            </a:r>
-            <a:r>
-              <a:rPr sz="1350" b="0" i="1" dirty="0" err="1">
-                <a:solidFill>
-                  <a:srgbClr val="55635A"/>
-                </a:solidFill>
-                <a:latin typeface="Calibri"/>
-              </a:rPr>
-              <a:t>đạt</a:t>
-            </a:r>
-            <a:r>
-              <a:rPr sz="1350" b="0" i="1" dirty="0">
-                <a:solidFill>
-                  <a:srgbClr val="55635A"/>
-                </a:solidFill>
-                <a:latin typeface="Calibri"/>
-              </a:rPr>
-              <a:t> quality bar </a:t>
-            </a:r>
-            <a:r>
-              <a:rPr sz="1350" b="0" i="1" dirty="0" err="1">
-                <a:solidFill>
-                  <a:srgbClr val="55635A"/>
-                </a:solidFill>
-                <a:latin typeface="Calibri"/>
-              </a:rPr>
-              <a:t>và</a:t>
-            </a:r>
-            <a:r>
-              <a:rPr sz="1350" b="0" i="1" dirty="0">
-                <a:solidFill>
-                  <a:srgbClr val="55635A"/>
-                </a:solidFill>
-                <a:latin typeface="Calibri"/>
-              </a:rPr>
-              <a:t> </a:t>
-            </a:r>
-            <a:r>
-              <a:rPr sz="1350" b="0" i="1" dirty="0" err="1">
-                <a:solidFill>
-                  <a:srgbClr val="55635A"/>
-                </a:solidFill>
-                <a:latin typeface="Calibri"/>
-              </a:rPr>
-              <a:t>vì</a:t>
-            </a:r>
-            <a:r>
-              <a:rPr sz="1350" b="0" i="1" dirty="0">
-                <a:solidFill>
-                  <a:srgbClr val="55635A"/>
-                </a:solidFill>
-                <a:latin typeface="Calibri"/>
-              </a:rPr>
-              <a:t> </a:t>
-            </a:r>
-            <a:r>
-              <a:rPr sz="1350" b="0" i="1" dirty="0" err="1">
-                <a:solidFill>
-                  <a:srgbClr val="55635A"/>
-                </a:solidFill>
-                <a:latin typeface="Calibri"/>
-              </a:rPr>
-              <a:t>sao</a:t>
-            </a:r>
-            <a:endParaRPr sz="1350" b="0" i="1" dirty="0">
-              <a:solidFill>
-                <a:srgbClr val="55635A"/>
-              </a:solidFill>
-              <a:latin typeface="Calibri"/>
-            </a:endParaRPr>
+              <a:t> CP1</a:t>
+            </a:r>
           </a:p>
         </p:txBody>
       </p:sp>
@@ -9438,43 +9171,7 @@
                 </a:solidFill>
                 <a:latin typeface="Calibri"/>
               </a:rPr>
-              <a:t>ĐẠT quality bar </a:t>
-            </a:r>
-            <a:r>
-              <a:rPr sz="1450" b="1" i="0" dirty="0" err="1">
-                <a:solidFill>
-                  <a:srgbClr val="B87A1E"/>
-                </a:solidFill>
-                <a:latin typeface="Calibri"/>
-              </a:rPr>
-              <a:t>đã</a:t>
-            </a:r>
-            <a:r>
-              <a:rPr sz="1450" b="1" i="0" dirty="0">
-                <a:solidFill>
-                  <a:srgbClr val="B87A1E"/>
-                </a:solidFill>
-                <a:latin typeface="Calibri"/>
-              </a:rPr>
-              <a:t> </a:t>
-            </a:r>
-            <a:r>
-              <a:rPr sz="1450" b="1" i="0" dirty="0" err="1">
-                <a:solidFill>
-                  <a:srgbClr val="B87A1E"/>
-                </a:solidFill>
-                <a:latin typeface="Calibri"/>
-              </a:rPr>
-              <a:t>chốt</a:t>
-            </a:r>
-            <a:r>
-              <a:rPr sz="1450" b="1" i="0" dirty="0">
-                <a:solidFill>
-                  <a:srgbClr val="B87A1E"/>
-                </a:solidFill>
-                <a:latin typeface="Calibri"/>
-              </a:rPr>
-              <a:t>.  </a:t>
+              <a:t>2 willing user thật đã dùng thử. </a:t>
             </a:r>
             <a:r>
               <a:rPr sz="1450" b="0" i="0" dirty="0">
@@ -9483,115 +9180,7 @@
                 </a:solidFill>
                 <a:latin typeface="Calibri"/>
               </a:rPr>
-              <a:t>Golden set 20 ca: 17/20 (85%) — </a:t>
-            </a:r>
-            <a:r>
-              <a:rPr lang="en-US" sz="1450" b="0" i="0" dirty="0" err="1">
-                <a:solidFill>
-                  <a:srgbClr val="1F2A24"/>
-                </a:solidFill>
-                <a:latin typeface="Calibri"/>
-              </a:rPr>
-              <a:t>trên</a:t>
-            </a:r>
-            <a:r>
-              <a:rPr sz="1450" b="0" i="0" dirty="0">
-                <a:solidFill>
-                  <a:srgbClr val="1F2A24"/>
-                </a:solidFill>
-                <a:latin typeface="Calibri"/>
-              </a:rPr>
-              <a:t> </a:t>
-            </a:r>
-            <a:r>
-              <a:rPr sz="1450" b="0" i="0" dirty="0" err="1">
-                <a:solidFill>
-                  <a:srgbClr val="1F2A24"/>
-                </a:solidFill>
-                <a:latin typeface="Calibri"/>
-              </a:rPr>
-              <a:t>mốc</a:t>
-            </a:r>
-            <a:r>
-              <a:rPr sz="1450" b="0" i="0" dirty="0">
-                <a:solidFill>
-                  <a:srgbClr val="1F2A24"/>
-                </a:solidFill>
-                <a:latin typeface="Calibri"/>
-              </a:rPr>
-              <a:t> 1</a:t>
-            </a:r>
-            <a:r>
-              <a:rPr lang="en-US" sz="1450" b="0" i="0" dirty="0">
-                <a:solidFill>
-                  <a:srgbClr val="1F2A24"/>
-                </a:solidFill>
-                <a:latin typeface="Calibri"/>
-              </a:rPr>
-              <a:t>6</a:t>
-            </a:r>
-            <a:r>
-              <a:rPr sz="1450" b="0" i="0" dirty="0">
-                <a:solidFill>
-                  <a:srgbClr val="1F2A24"/>
-                </a:solidFill>
-                <a:latin typeface="Calibri"/>
-              </a:rPr>
-              <a:t>/20 (</a:t>
-            </a:r>
-            <a:r>
-              <a:rPr lang="en-US" sz="1450" b="0" i="0" dirty="0">
-                <a:solidFill>
-                  <a:srgbClr val="1F2A24"/>
-                </a:solidFill>
-                <a:latin typeface="Calibri"/>
-              </a:rPr>
-              <a:t>8</a:t>
-            </a:r>
-            <a:r>
-              <a:rPr sz="1450" b="0" i="0" dirty="0">
-                <a:solidFill>
-                  <a:srgbClr val="1F2A24"/>
-                </a:solidFill>
-                <a:latin typeface="Calibri"/>
-              </a:rPr>
-              <a:t>0%) cam </a:t>
-            </a:r>
-            <a:r>
-              <a:rPr sz="1450" b="0" i="0" dirty="0" err="1">
-                <a:solidFill>
-                  <a:srgbClr val="1F2A24"/>
-                </a:solidFill>
-                <a:latin typeface="Calibri"/>
-              </a:rPr>
-              <a:t>kết</a:t>
-            </a:r>
-            <a:r>
-              <a:rPr sz="1450" b="0" i="0" dirty="0">
-                <a:solidFill>
-                  <a:srgbClr val="1F2A24"/>
-                </a:solidFill>
-                <a:latin typeface="Calibri"/>
-              </a:rPr>
-              <a:t> </a:t>
-            </a:r>
-            <a:r>
-              <a:rPr sz="1450" b="0" i="0" dirty="0" err="1">
-                <a:solidFill>
-                  <a:srgbClr val="1F2A24"/>
-                </a:solidFill>
-                <a:latin typeface="Calibri"/>
-              </a:rPr>
-              <a:t>tại</a:t>
-            </a:r>
-            <a:r>
-              <a:rPr sz="1450" b="0" i="0" dirty="0">
-                <a:solidFill>
-                  <a:srgbClr val="1F2A24"/>
-                </a:solidFill>
-                <a:latin typeface="Calibri"/>
-              </a:rPr>
-              <a:t> CP4.</a:t>
+              <a:t>Cả hai đều hiểu đúng câu hỏi ngược; phát hiện 1 vấn đề UI cần sửa trước demo.</a:t>
             </a:r>
           </a:p>
         </p:txBody>
@@ -9626,7 +9215,7 @@
                 </a:solidFill>
                 <a:latin typeface="Cambria"/>
               </a:rPr>
-              <a:t>Vì sao</a:t>
+              <a:t>Phát hiện</a:t>
             </a:r>
           </a:p>
         </p:txBody>
@@ -9704,11 +9293,11 @@
             <a:r>
               <a:rPr sz="1500" b="1" i="0">
                 <a:solidFill>
-                  <a:srgbClr val="B84B3E"/>
-                </a:solidFill>
-                <a:latin typeface="Calibri"/>
-              </a:rPr>
-              <a:t>G06</a:t>
+                  <a:srgbClr val="1F3D2B"/>
+                </a:solidFill>
+                <a:latin typeface="Calibri"/>
+              </a:rPr>
+              <a:t>Bảo — willing user</a:t>
             </a:r>
           </a:p>
         </p:txBody>
@@ -9747,259 +9336,7 @@
                 </a:solidFill>
                 <a:latin typeface="Calibri"/>
               </a:rPr>
-              <a:t>Evaluator </a:t>
-            </a:r>
-            <a:r>
-              <a:rPr sz="1200" b="0" i="0" dirty="0" err="1">
-                <a:solidFill>
-                  <a:srgbClr val="55635A"/>
-                </a:solidFill>
-                <a:latin typeface="Calibri"/>
-              </a:rPr>
-              <a:t>chưa</a:t>
-            </a:r>
-            <a:r>
-              <a:rPr sz="1200" b="0" i="0" dirty="0">
-                <a:solidFill>
-                  <a:srgbClr val="55635A"/>
-                </a:solidFill>
-                <a:latin typeface="Calibri"/>
-              </a:rPr>
-              <a:t> </a:t>
-            </a:r>
-            <a:r>
-              <a:rPr sz="1200" b="0" i="0" dirty="0" err="1">
-                <a:solidFill>
-                  <a:srgbClr val="55635A"/>
-                </a:solidFill>
-                <a:latin typeface="Calibri"/>
-              </a:rPr>
-              <a:t>ổn</a:t>
-            </a:r>
-            <a:r>
-              <a:rPr sz="1200" b="0" i="0" dirty="0">
-                <a:solidFill>
-                  <a:srgbClr val="55635A"/>
-                </a:solidFill>
-                <a:latin typeface="Calibri"/>
-              </a:rPr>
-              <a:t> </a:t>
-            </a:r>
-            <a:r>
-              <a:rPr sz="1200" b="0" i="0" dirty="0" err="1">
-                <a:solidFill>
-                  <a:srgbClr val="55635A"/>
-                </a:solidFill>
-                <a:latin typeface="Calibri"/>
-              </a:rPr>
-              <a:t>định</a:t>
-            </a:r>
-            <a:r>
-              <a:rPr sz="1200" b="0" i="0" dirty="0">
-                <a:solidFill>
-                  <a:srgbClr val="55635A"/>
-                </a:solidFill>
-                <a:latin typeface="Calibri"/>
-              </a:rPr>
-              <a:t> </a:t>
-            </a:r>
-            <a:r>
-              <a:rPr sz="1200" b="0" i="0" dirty="0" err="1">
-                <a:solidFill>
-                  <a:srgbClr val="55635A"/>
-                </a:solidFill>
-                <a:latin typeface="Calibri"/>
-              </a:rPr>
-              <a:t>khi</a:t>
-            </a:r>
-            <a:r>
-              <a:rPr sz="1200" b="0" i="0" dirty="0">
-                <a:solidFill>
-                  <a:srgbClr val="55635A"/>
-                </a:solidFill>
-                <a:latin typeface="Calibri"/>
-              </a:rPr>
-              <a:t> </a:t>
-            </a:r>
-            <a:r>
-              <a:rPr sz="1200" b="0" i="0" dirty="0" err="1">
-                <a:solidFill>
-                  <a:srgbClr val="55635A"/>
-                </a:solidFill>
-                <a:latin typeface="Calibri"/>
-              </a:rPr>
-              <a:t>một</a:t>
-            </a:r>
-            <a:r>
-              <a:rPr sz="1200" b="0" i="0" dirty="0">
-                <a:solidFill>
-                  <a:srgbClr val="55635A"/>
-                </a:solidFill>
-                <a:latin typeface="Calibri"/>
-              </a:rPr>
-              <a:t> </a:t>
-            </a:r>
-            <a:r>
-              <a:rPr sz="1200" b="0" i="0" dirty="0" err="1">
-                <a:solidFill>
-                  <a:srgbClr val="55635A"/>
-                </a:solidFill>
-                <a:latin typeface="Calibri"/>
-              </a:rPr>
-              <a:t>câu</a:t>
-            </a:r>
-            <a:r>
-              <a:rPr sz="1200" b="0" i="0" dirty="0">
-                <a:solidFill>
-                  <a:srgbClr val="55635A"/>
-                </a:solidFill>
-                <a:latin typeface="Calibri"/>
-              </a:rPr>
-              <a:t> </a:t>
-            </a:r>
-            <a:r>
-              <a:rPr sz="1200" b="0" i="0" dirty="0" err="1">
-                <a:solidFill>
-                  <a:srgbClr val="55635A"/>
-                </a:solidFill>
-                <a:latin typeface="Calibri"/>
-              </a:rPr>
-              <a:t>trả</a:t>
-            </a:r>
-            <a:r>
-              <a:rPr sz="1200" b="0" i="0" dirty="0">
-                <a:solidFill>
-                  <a:srgbClr val="55635A"/>
-                </a:solidFill>
-                <a:latin typeface="Calibri"/>
-              </a:rPr>
-              <a:t> </a:t>
-            </a:r>
-            <a:r>
-              <a:rPr sz="1200" b="0" i="0" dirty="0" err="1">
-                <a:solidFill>
-                  <a:srgbClr val="55635A"/>
-                </a:solidFill>
-                <a:latin typeface="Calibri"/>
-              </a:rPr>
-              <a:t>lời</a:t>
-            </a:r>
-            <a:r>
-              <a:rPr sz="1200" b="0" i="0" dirty="0">
-                <a:solidFill>
-                  <a:srgbClr val="55635A"/>
-                </a:solidFill>
-                <a:latin typeface="Calibri"/>
-              </a:rPr>
-              <a:t> </a:t>
-            </a:r>
-            <a:r>
-              <a:rPr sz="1200" b="0" i="0" dirty="0" err="1">
-                <a:solidFill>
-                  <a:srgbClr val="55635A"/>
-                </a:solidFill>
-                <a:latin typeface="Calibri"/>
-              </a:rPr>
-              <a:t>gộp</a:t>
-            </a:r>
-            <a:r>
-              <a:rPr sz="1200" b="0" i="0" dirty="0">
-                <a:solidFill>
-                  <a:srgbClr val="55635A"/>
-                </a:solidFill>
-                <a:latin typeface="Calibri"/>
-              </a:rPr>
-              <a:t> </a:t>
-            </a:r>
-            <a:r>
-              <a:rPr sz="1200" b="0" i="0" dirty="0" err="1">
-                <a:solidFill>
-                  <a:srgbClr val="55635A"/>
-                </a:solidFill>
-                <a:latin typeface="Calibri"/>
-              </a:rPr>
-              <a:t>nhiều</a:t>
-            </a:r>
-            <a:r>
-              <a:rPr sz="1200" b="0" i="0" dirty="0">
-                <a:solidFill>
-                  <a:srgbClr val="55635A"/>
-                </a:solidFill>
-                <a:latin typeface="Calibri"/>
-              </a:rPr>
-              <a:t> </a:t>
-            </a:r>
-            <a:r>
-              <a:rPr sz="1200" b="0" i="0" dirty="0" err="1">
-                <a:solidFill>
-                  <a:srgbClr val="55635A"/>
-                </a:solidFill>
-                <a:latin typeface="Calibri"/>
-              </a:rPr>
-              <a:t>tiêu</a:t>
-            </a:r>
-            <a:r>
-              <a:rPr sz="1200" b="0" i="0" dirty="0">
-                <a:solidFill>
-                  <a:srgbClr val="55635A"/>
-                </a:solidFill>
-                <a:latin typeface="Calibri"/>
-              </a:rPr>
-              <a:t> </a:t>
-            </a:r>
-            <a:r>
-              <a:rPr sz="1200" b="0" i="0" dirty="0" err="1">
-                <a:solidFill>
-                  <a:srgbClr val="55635A"/>
-                </a:solidFill>
-                <a:latin typeface="Calibri"/>
-              </a:rPr>
-              <a:t>chí</a:t>
-            </a:r>
-            <a:r>
-              <a:rPr sz="1200" b="0" i="0" dirty="0">
-                <a:solidFill>
-                  <a:srgbClr val="55635A"/>
-                </a:solidFill>
-                <a:latin typeface="Calibri"/>
-              </a:rPr>
-              <a:t> </a:t>
-            </a:r>
-            <a:r>
-              <a:rPr sz="1200" b="0" i="0" dirty="0" err="1">
-                <a:solidFill>
-                  <a:srgbClr val="55635A"/>
-                </a:solidFill>
-                <a:latin typeface="Calibri"/>
-              </a:rPr>
-              <a:t>cùng</a:t>
-            </a:r>
-            <a:r>
-              <a:rPr sz="1200" b="0" i="0" dirty="0">
-                <a:solidFill>
-                  <a:srgbClr val="55635A"/>
-                </a:solidFill>
-                <a:latin typeface="Calibri"/>
-              </a:rPr>
-              <a:t> </a:t>
-            </a:r>
-            <a:r>
-              <a:rPr sz="1200" b="0" i="0" dirty="0" err="1">
-                <a:solidFill>
-                  <a:srgbClr val="55635A"/>
-                </a:solidFill>
-                <a:latin typeface="Calibri"/>
-              </a:rPr>
-              <a:t>lúc</a:t>
-            </a:r>
-            <a:r>
-              <a:rPr sz="1200" b="0" i="0" dirty="0">
-                <a:solidFill>
-                  <a:srgbClr val="55635A"/>
-                </a:solidFill>
-                <a:latin typeface="Calibri"/>
-              </a:rPr>
-              <a:t>.</a:t>
+              <a:t>Quote: “À tưởng đúng rồi, hoá ra thiếu ví dụ à” — do dự khi bị hỏi ngược thiếu “định nghĩa”, nhưng hiểu đúng câu hỏi.</a:t>
             </a:r>
           </a:p>
         </p:txBody>
@@ -10077,11 +9414,11 @@
             <a:r>
               <a:rPr sz="1500" b="1" i="0">
                 <a:solidFill>
-                  <a:srgbClr val="B84B3E"/>
-                </a:solidFill>
-                <a:latin typeface="Calibri"/>
-              </a:rPr>
-              <a:t>G07</a:t>
+                  <a:srgbClr val="1F3D2B"/>
+                </a:solidFill>
+                <a:latin typeface="Calibri"/>
+              </a:rPr>
+              <a:t>Chính — willing user</a:t>
             </a:r>
           </a:p>
         </p:txBody>
@@ -10114,202 +9451,13 @@
               </a:lnSpc>
             </a:pPr>
             <a:r>
-              <a:rPr sz="1200" b="0" i="0" dirty="0" err="1">
+              <a:rPr sz="1200" b="0" i="0" dirty="0">
                 <a:solidFill>
                   <a:srgbClr val="55635A"/>
                 </a:solidFill>
                 <a:latin typeface="Calibri"/>
               </a:rPr>
-              <a:t>Lỗi</a:t>
-            </a:r>
-            <a:r>
-              <a:rPr sz="1200" b="0" i="0" dirty="0">
-                <a:solidFill>
-                  <a:srgbClr val="55635A"/>
-                </a:solidFill>
-                <a:latin typeface="Calibri"/>
-              </a:rPr>
-              <a:t> </a:t>
-            </a:r>
-            <a:r>
-              <a:rPr sz="1200" b="0" i="0" dirty="0" err="1">
-                <a:solidFill>
-                  <a:srgbClr val="55635A"/>
-                </a:solidFill>
-                <a:latin typeface="Calibri"/>
-              </a:rPr>
-              <a:t>chuẩn</a:t>
-            </a:r>
-            <a:r>
-              <a:rPr sz="1200" b="0" i="0" dirty="0">
-                <a:solidFill>
-                  <a:srgbClr val="55635A"/>
-                </a:solidFill>
-                <a:latin typeface="Calibri"/>
-              </a:rPr>
-              <a:t> </a:t>
-            </a:r>
-            <a:r>
-              <a:rPr sz="1200" b="0" i="0" dirty="0" err="1">
-                <a:solidFill>
-                  <a:srgbClr val="55635A"/>
-                </a:solidFill>
-                <a:latin typeface="Calibri"/>
-              </a:rPr>
-              <a:t>hoá</a:t>
-            </a:r>
-            <a:r>
-              <a:rPr sz="1200" b="0" i="0" dirty="0">
-                <a:solidFill>
-                  <a:srgbClr val="55635A"/>
-                </a:solidFill>
-                <a:latin typeface="Calibri"/>
-              </a:rPr>
-              <a:t> (normalize) </a:t>
-            </a:r>
-            <a:r>
-              <a:rPr sz="1200" b="0" i="0" dirty="0" err="1">
-                <a:solidFill>
-                  <a:srgbClr val="55635A"/>
-                </a:solidFill>
-                <a:latin typeface="Calibri"/>
-              </a:rPr>
-              <a:t>sau</a:t>
-            </a:r>
-            <a:r>
-              <a:rPr sz="1200" b="0" i="0" dirty="0">
-                <a:solidFill>
-                  <a:srgbClr val="55635A"/>
-                </a:solidFill>
-                <a:latin typeface="Calibri"/>
-              </a:rPr>
-              <a:t> retry </a:t>
-            </a:r>
-            <a:r>
-              <a:rPr sz="1200" b="0" i="0" dirty="0" err="1">
-                <a:solidFill>
-                  <a:srgbClr val="55635A"/>
-                </a:solidFill>
-                <a:latin typeface="Calibri"/>
-              </a:rPr>
-              <a:t>chưa</a:t>
-            </a:r>
-            <a:r>
-              <a:rPr sz="1200" b="0" i="0" dirty="0">
-                <a:solidFill>
-                  <a:srgbClr val="55635A"/>
-                </a:solidFill>
-                <a:latin typeface="Calibri"/>
-              </a:rPr>
-              <a:t> </a:t>
-            </a:r>
-            <a:r>
-              <a:rPr sz="1200" b="0" i="0" dirty="0" err="1">
-                <a:solidFill>
-                  <a:srgbClr val="55635A"/>
-                </a:solidFill>
-                <a:latin typeface="Calibri"/>
-              </a:rPr>
-              <a:t>xác</a:t>
-            </a:r>
-            <a:r>
-              <a:rPr sz="1200" b="0" i="0" dirty="0">
-                <a:solidFill>
-                  <a:srgbClr val="55635A"/>
-                </a:solidFill>
-                <a:latin typeface="Calibri"/>
-              </a:rPr>
-              <a:t> </a:t>
-            </a:r>
-            <a:r>
-              <a:rPr sz="1200" b="0" i="0" dirty="0" err="1">
-                <a:solidFill>
-                  <a:srgbClr val="55635A"/>
-                </a:solidFill>
-                <a:latin typeface="Calibri"/>
-              </a:rPr>
-              <a:t>định</a:t>
-            </a:r>
-            <a:r>
-              <a:rPr sz="1200" b="0" i="0" dirty="0">
-                <a:solidFill>
-                  <a:srgbClr val="55635A"/>
-                </a:solidFill>
-                <a:latin typeface="Calibri"/>
-              </a:rPr>
-              <a:t> </a:t>
-            </a:r>
-            <a:r>
-              <a:rPr sz="1200" b="0" i="0" dirty="0" err="1">
-                <a:solidFill>
-                  <a:srgbClr val="55635A"/>
-                </a:solidFill>
-                <a:latin typeface="Calibri"/>
-              </a:rPr>
-              <a:t>được</a:t>
-            </a:r>
-            <a:r>
-              <a:rPr sz="1200" b="0" i="0" dirty="0">
-                <a:solidFill>
-                  <a:srgbClr val="55635A"/>
-                </a:solidFill>
-                <a:latin typeface="Calibri"/>
-              </a:rPr>
-              <a:t> </a:t>
-            </a:r>
-            <a:r>
-              <a:rPr sz="1200" b="0" i="0" dirty="0" err="1">
-                <a:solidFill>
-                  <a:srgbClr val="55635A"/>
-                </a:solidFill>
-                <a:latin typeface="Calibri"/>
-              </a:rPr>
-              <a:t>nguyên</a:t>
-            </a:r>
-            <a:r>
-              <a:rPr sz="1200" b="0" i="0" dirty="0">
-                <a:solidFill>
-                  <a:srgbClr val="55635A"/>
-                </a:solidFill>
-                <a:latin typeface="Calibri"/>
-              </a:rPr>
-              <a:t> </a:t>
-            </a:r>
-            <a:r>
-              <a:rPr sz="1200" b="0" i="0" dirty="0" err="1">
-                <a:solidFill>
-                  <a:srgbClr val="55635A"/>
-                </a:solidFill>
-                <a:latin typeface="Calibri"/>
-              </a:rPr>
-              <a:t>nhân</a:t>
-            </a:r>
-            <a:r>
-              <a:rPr sz="1200" b="0" i="0" dirty="0">
-                <a:solidFill>
-                  <a:srgbClr val="55635A"/>
-                </a:solidFill>
-                <a:latin typeface="Calibri"/>
-              </a:rPr>
-              <a:t> ở field </a:t>
-            </a:r>
-            <a:r>
-              <a:rPr sz="1200" b="0" i="0" dirty="0" err="1">
-                <a:solidFill>
-                  <a:srgbClr val="55635A"/>
-                </a:solidFill>
-                <a:latin typeface="Calibri"/>
-              </a:rPr>
-              <a:t>nào</a:t>
-            </a:r>
-            <a:r>
-              <a:rPr sz="1200" b="0" i="0" dirty="0">
-                <a:solidFill>
-                  <a:srgbClr val="55635A"/>
-                </a:solidFill>
-                <a:latin typeface="Calibri"/>
-              </a:rPr>
-              <a:t>.</a:t>
+              <a:t>Quote: “Cái đầu tiên nó feedback gì tôi không để ý, tưởng lỗi nên bấm lại” — gửi 2 lần liên tiếp vì không rõ hệ thống đang chấm.</a:t>
             </a:r>
           </a:p>
         </p:txBody>
@@ -10387,11 +9535,11 @@
             <a:r>
               <a:rPr sz="1500" b="1" i="0">
                 <a:solidFill>
-                  <a:srgbClr val="B84B3E"/>
-                </a:solidFill>
-                <a:latin typeface="Calibri"/>
-              </a:rPr>
-              <a:t>G12</a:t>
+                  <a:srgbClr val="B87A1E"/>
+                </a:solidFill>
+                <a:latin typeface="Calibri"/>
+              </a:rPr>
+              <a:t>Backlog trước demo</a:t>
             </a:r>
           </a:p>
         </p:txBody>
@@ -10430,259 +9578,7 @@
                 </a:solidFill>
                 <a:latin typeface="Calibri"/>
               </a:rPr>
-              <a:t>Correction (</a:t>
-            </a:r>
-            <a:r>
-              <a:rPr sz="1200" b="0" i="0" dirty="0" err="1">
-                <a:solidFill>
-                  <a:srgbClr val="55635A"/>
-                </a:solidFill>
-                <a:latin typeface="Calibri"/>
-              </a:rPr>
-              <a:t>phát</a:t>
-            </a:r>
-            <a:r>
-              <a:rPr sz="1200" b="0" i="0" dirty="0">
-                <a:solidFill>
-                  <a:srgbClr val="55635A"/>
-                </a:solidFill>
-                <a:latin typeface="Calibri"/>
-              </a:rPr>
-              <a:t> </a:t>
-            </a:r>
-            <a:r>
-              <a:rPr sz="1200" b="0" i="0" dirty="0" err="1">
-                <a:solidFill>
-                  <a:srgbClr val="55635A"/>
-                </a:solidFill>
-                <a:latin typeface="Calibri"/>
-              </a:rPr>
-              <a:t>biểu</a:t>
-            </a:r>
-            <a:r>
-              <a:rPr sz="1200" b="0" i="0" dirty="0">
-                <a:solidFill>
-                  <a:srgbClr val="55635A"/>
-                </a:solidFill>
-                <a:latin typeface="Calibri"/>
-              </a:rPr>
-              <a:t> </a:t>
-            </a:r>
-            <a:r>
-              <a:rPr sz="1200" b="0" i="0" dirty="0" err="1">
-                <a:solidFill>
-                  <a:srgbClr val="55635A"/>
-                </a:solidFill>
-                <a:latin typeface="Calibri"/>
-              </a:rPr>
-              <a:t>sửa</a:t>
-            </a:r>
-            <a:r>
-              <a:rPr sz="1200" b="0" i="0" dirty="0">
-                <a:solidFill>
-                  <a:srgbClr val="55635A"/>
-                </a:solidFill>
-                <a:latin typeface="Calibri"/>
-              </a:rPr>
-              <a:t> </a:t>
-            </a:r>
-            <a:r>
-              <a:rPr sz="1200" b="0" i="0" dirty="0" err="1">
-                <a:solidFill>
-                  <a:srgbClr val="55635A"/>
-                </a:solidFill>
-                <a:latin typeface="Calibri"/>
-              </a:rPr>
-              <a:t>sai</a:t>
-            </a:r>
-            <a:r>
-              <a:rPr sz="1200" b="0" i="0" dirty="0">
-                <a:solidFill>
-                  <a:srgbClr val="55635A"/>
-                </a:solidFill>
-                <a:latin typeface="Calibri"/>
-              </a:rPr>
-              <a:t>) </a:t>
-            </a:r>
-            <a:r>
-              <a:rPr sz="1200" b="0" i="0" dirty="0" err="1">
-                <a:solidFill>
-                  <a:srgbClr val="55635A"/>
-                </a:solidFill>
-                <a:latin typeface="Calibri"/>
-              </a:rPr>
-              <a:t>chưa</a:t>
-            </a:r>
-            <a:r>
-              <a:rPr sz="1200" b="0" i="0" dirty="0">
-                <a:solidFill>
-                  <a:srgbClr val="55635A"/>
-                </a:solidFill>
-                <a:latin typeface="Calibri"/>
-              </a:rPr>
-              <a:t> </a:t>
-            </a:r>
-            <a:r>
-              <a:rPr sz="1200" b="0" i="0" dirty="0" err="1">
-                <a:solidFill>
-                  <a:srgbClr val="55635A"/>
-                </a:solidFill>
-                <a:latin typeface="Calibri"/>
-              </a:rPr>
-              <a:t>luôn</a:t>
-            </a:r>
-            <a:r>
-              <a:rPr sz="1200" b="0" i="0" dirty="0">
-                <a:solidFill>
-                  <a:srgbClr val="55635A"/>
-                </a:solidFill>
-                <a:latin typeface="Calibri"/>
-              </a:rPr>
-              <a:t> </a:t>
-            </a:r>
-            <a:r>
-              <a:rPr sz="1200" b="0" i="0" dirty="0" err="1">
-                <a:solidFill>
-                  <a:srgbClr val="55635A"/>
-                </a:solidFill>
-                <a:latin typeface="Calibri"/>
-              </a:rPr>
-              <a:t>thay</a:t>
-            </a:r>
-            <a:r>
-              <a:rPr sz="1200" b="0" i="0" dirty="0">
-                <a:solidFill>
-                  <a:srgbClr val="55635A"/>
-                </a:solidFill>
-                <a:latin typeface="Calibri"/>
-              </a:rPr>
-              <a:t> </a:t>
-            </a:r>
-            <a:r>
-              <a:rPr sz="1200" b="0" i="0" dirty="0" err="1">
-                <a:solidFill>
-                  <a:srgbClr val="55635A"/>
-                </a:solidFill>
-                <a:latin typeface="Calibri"/>
-              </a:rPr>
-              <a:t>thế</a:t>
-            </a:r>
-            <a:r>
-              <a:rPr sz="1200" b="0" i="0" dirty="0">
-                <a:solidFill>
-                  <a:srgbClr val="55635A"/>
-                </a:solidFill>
-                <a:latin typeface="Calibri"/>
-              </a:rPr>
-              <a:t> </a:t>
-            </a:r>
-            <a:r>
-              <a:rPr sz="1200" b="0" i="0" dirty="0" err="1">
-                <a:solidFill>
-                  <a:srgbClr val="55635A"/>
-                </a:solidFill>
-                <a:latin typeface="Calibri"/>
-              </a:rPr>
-              <a:t>đúng</a:t>
-            </a:r>
-            <a:r>
-              <a:rPr sz="1200" b="0" i="0" dirty="0">
-                <a:solidFill>
-                  <a:srgbClr val="55635A"/>
-                </a:solidFill>
-                <a:latin typeface="Calibri"/>
-              </a:rPr>
-              <a:t> ý </a:t>
-            </a:r>
-            <a:r>
-              <a:rPr sz="1200" b="0" i="0" dirty="0" err="1">
-                <a:solidFill>
-                  <a:srgbClr val="55635A"/>
-                </a:solidFill>
-                <a:latin typeface="Calibri"/>
-              </a:rPr>
-              <a:t>sai</a:t>
-            </a:r>
-            <a:r>
-              <a:rPr sz="1200" b="0" i="0" dirty="0">
-                <a:solidFill>
-                  <a:srgbClr val="55635A"/>
-                </a:solidFill>
-                <a:latin typeface="Calibri"/>
-              </a:rPr>
-              <a:t> </a:t>
-            </a:r>
-            <a:r>
-              <a:rPr sz="1200" b="0" i="0" dirty="0" err="1">
-                <a:solidFill>
-                  <a:srgbClr val="55635A"/>
-                </a:solidFill>
-                <a:latin typeface="Calibri"/>
-              </a:rPr>
-              <a:t>cũ</a:t>
-            </a:r>
-            <a:r>
-              <a:rPr sz="1200" b="0" i="0" dirty="0">
-                <a:solidFill>
-                  <a:srgbClr val="55635A"/>
-                </a:solidFill>
-                <a:latin typeface="Calibri"/>
-              </a:rPr>
-              <a:t> </a:t>
-            </a:r>
-            <a:r>
-              <a:rPr sz="1200" b="0" i="0" dirty="0" err="1">
-                <a:solidFill>
-                  <a:srgbClr val="55635A"/>
-                </a:solidFill>
-                <a:latin typeface="Calibri"/>
-              </a:rPr>
-              <a:t>trong</a:t>
-            </a:r>
-            <a:r>
-              <a:rPr sz="1200" b="0" i="0" dirty="0">
-                <a:solidFill>
-                  <a:srgbClr val="55635A"/>
-                </a:solidFill>
-                <a:latin typeface="Calibri"/>
-              </a:rPr>
-              <a:t> </a:t>
-            </a:r>
-            <a:r>
-              <a:rPr sz="1200" b="0" i="0" dirty="0" err="1">
-                <a:solidFill>
-                  <a:srgbClr val="55635A"/>
-                </a:solidFill>
-                <a:latin typeface="Calibri"/>
-              </a:rPr>
-              <a:t>đánh</a:t>
-            </a:r>
-            <a:r>
-              <a:rPr sz="1200" b="0" i="0" dirty="0">
-                <a:solidFill>
-                  <a:srgbClr val="55635A"/>
-                </a:solidFill>
-                <a:latin typeface="Calibri"/>
-              </a:rPr>
-              <a:t> </a:t>
-            </a:r>
-            <a:r>
-              <a:rPr sz="1200" b="0" i="0" dirty="0" err="1">
-                <a:solidFill>
-                  <a:srgbClr val="55635A"/>
-                </a:solidFill>
-                <a:latin typeface="Calibri"/>
-              </a:rPr>
-              <a:t>giá</a:t>
-            </a:r>
-            <a:r>
-              <a:rPr sz="1200" b="0" i="0" dirty="0">
-                <a:solidFill>
-                  <a:srgbClr val="55635A"/>
-                </a:solidFill>
-                <a:latin typeface="Calibri"/>
-              </a:rPr>
-              <a:t>.</a:t>
+              <a:t>Thêm trạng thái “đang chấm...” rõ ràng trên UI để chặn double-submit — phát hiện từ cả 2 người thử.</a:t>
             </a:r>
           </a:p>
         </p:txBody>
